--- a/docs/fornow/实习总结汇报 · StarryOS 异步驱动开发.pptx
+++ b/docs/fornow/实习总结汇报 · StarryOS 异步驱动开发.pptx
@@ -381,9 +381,15 @@
                 <a:latin typeface="MiSans" charset="-122"/>
                 <a:ea typeface="MiSans" charset="-122"/>
               </a:rPr>
-              <a:t>StarryOS 异步驱动开发</a:t>
-            </a:r>
-            <a:endParaRPr lang="en-US" sz="3800" noProof="1"/>
+              <a:t>starryos的串口、有线网卡的异步化</a:t>
+            </a:r>
+            <a:endParaRPr lang="en-US" sz="3800" b="1" noProof="1">
+              <a:solidFill>
+                <a:srgbClr val="1E2A36"/>
+              </a:solidFill>
+              <a:latin typeface="MiSans" charset="-122"/>
+              <a:ea typeface="MiSans" charset="-122"/>
+            </a:endParaRPr>
           </a:p>
         </p:txBody>
       </p:sp>

--- a/docs/fornow/实习总结汇报 · StarryOS 异步驱动开发.pptx
+++ b/docs/fornow/实习总结汇报 · StarryOS 异步驱动开发.pptx
@@ -449,7 +449,7 @@
                 <a:latin typeface="MiSans" charset="-122"/>
                 <a:ea typeface="MiSans" charset="-122"/>
               </a:rPr>
-              <a:t>　｜　实习时间：2026-06-21 ~ 2026-10-4</a:t>
+              <a:t>　｜　实习时间：2026-06-22 ~ 2026-10-4</a:t>
             </a:r>
             <a:endParaRPr lang="en-US" sz="1250" noProof="1"/>
           </a:p>
@@ -4315,7 +4315,7 @@
       <p:grpSpPr/>
       <p:pic>
         <p:nvPicPr>
-          <p:cNvPr id="2" name="图片 1"/>
+          <p:cNvPr id="3" name="图片 2"/>
           <p:cNvPicPr>
             <a:picLocks noChangeAspect="1"/>
           </p:cNvPicPr>
@@ -4329,8 +4329,32 @@
         </p:blipFill>
         <p:spPr>
           <a:xfrm>
-            <a:off x="3194685" y="336550"/>
-            <a:ext cx="6363970" cy="6184265"/>
+            <a:off x="6137910" y="1162050"/>
+            <a:ext cx="4548505" cy="4420235"/>
+          </a:xfrm>
+          <a:prstGeom prst="rect">
+            <a:avLst/>
+          </a:prstGeom>
+        </p:spPr>
+      </p:pic>
+      <p:pic>
+        <p:nvPicPr>
+          <p:cNvPr id="4" name="图片 3"/>
+          <p:cNvPicPr>
+            <a:picLocks noChangeAspect="1"/>
+          </p:cNvPicPr>
+          <p:nvPr/>
+        </p:nvPicPr>
+        <p:blipFill>
+          <a:blip r:embed="rId2"/>
+          <a:stretch>
+            <a:fillRect/>
+          </a:stretch>
+        </p:blipFill>
+        <p:spPr>
+          <a:xfrm>
+            <a:off x="1214755" y="1149985"/>
+            <a:ext cx="4573270" cy="4444365"/>
           </a:xfrm>
           <a:prstGeom prst="rect">
             <a:avLst/>
@@ -4682,7 +4706,7 @@
                 <a:latin typeface="MiSans" charset="-122"/>
                 <a:ea typeface="MiSans" charset="-122"/>
               </a:rPr>
-              <a:t>6/21 – 7/25</a:t>
+              <a:t>6/22 – 7/25</a:t>
             </a:r>
             <a:endParaRPr lang="en-US" sz="1400" noProof="1"/>
           </a:p>
@@ -9454,7 +9478,37 @@
                 <a:latin typeface="MiSans" charset="-122"/>
                 <a:ea typeface="MiSans" charset="-122"/>
               </a:rPr>
-              <a:t>队列有界、背压可见、故障可恢复</a:t>
+              <a:t>队列有界、背压</a:t>
+            </a:r>
+            <a:r>
+              <a:rPr lang="zh-CN" altLang="en-US" sz="1200" noProof="1">
+                <a:solidFill>
+                  <a:srgbClr val="5F6E7C"/>
+                </a:solidFill>
+                <a:latin typeface="MiSans" charset="-122"/>
+                <a:ea typeface="MiSans" charset="-122"/>
+              </a:rPr>
+              <a:t>（上游流速大于下游</a:t>
+            </a:r>
+            <a:r>
+              <a:rPr lang="zh-CN" altLang="en-US" sz="1200" noProof="1">
+                <a:solidFill>
+                  <a:srgbClr val="5F6E7C"/>
+                </a:solidFill>
+                <a:latin typeface="MiSans" charset="-122"/>
+                <a:ea typeface="MiSans" charset="-122"/>
+              </a:rPr>
+              <a:t>）</a:t>
+            </a:r>
+            <a:r>
+              <a:rPr lang="en-US" sz="1200" noProof="1">
+                <a:solidFill>
+                  <a:srgbClr val="5F6E7C"/>
+                </a:solidFill>
+                <a:latin typeface="MiSans" charset="-122"/>
+                <a:ea typeface="MiSans" charset="-122"/>
+              </a:rPr>
+              <a:t>可见、故障可恢复</a:t>
             </a:r>
             <a:endParaRPr lang="en-US" sz="1200" noProof="1"/>
           </a:p>
